--- a/slides/20261013_publication_direction.pptx
+++ b/slides/20261013_publication_direction.pptx
@@ -2980,21 +2980,21 @@
                   <a:srgbClr val="002A5C"/>
                 </a:solidFill>
               </a:rPr>
-              <a:t>Among identically sized peptides</a:t>
+              <a:t>Among peptides matched on size</a:t>
             </a:r>
           </a:p>
           <a:p>
             <a:pPr lvl="1"/>
             <a:r>
               <a:rPr sz="1700"/>
-              <a:t>MM/PBSA picks the tighter binder 60.1% of the time, 95% CI [53.0, 69.3]. The interval clears chance, so the skill is real.</a:t>
+              <a:t>Within a 3-atom window MM/PBSA picks the tighter binder 62.4% of the time, 95% CI [55.5, 68.9] — the interval clears chance.</a:t>
             </a:r>
           </a:p>
           <a:p>
             <a:pPr lvl="1"/>
             <a:r>
               <a:rPr sz="1700"/>
-              <a:t>FEP+ reaches 84.1% [75.6, 91.2] on the same pairs.</a:t>
+              <a:t>At exactly equal size the estimate is 62.4% but the interval [47.2, 72.0] includes chance: too few same-size pairs exist.</a:t>
             </a:r>
           </a:p>
           <a:p>
@@ -3015,7 +3015,7 @@
             <a:pPr lvl="1"/>
             <a:r>
               <a:rPr sz="1700"/>
-              <a:t>Clearly above chance on PCSK9 (76.5%) and JAK2 (63.7%). On Cyclin A/B, KRAS and MCL-1 the intervals include 50% — we cannot claim skill there.</a:t>
+              <a:t>Only PCSK9 (75.7%) is individually above chance. Cyclin A/B, JAK2, KRAS and MCL-1 all span 50% once intervals resample compounds rather than pairs.</a:t>
             </a:r>
           </a:p>
           <a:p>
@@ -3084,7 +3084,7 @@
                 </a:solidFill>
                 <a:latin typeface="Arial"/>
               </a:rPr>
-              <a:t>60.1%</a:t>
+              <a:t>62.4%</a:t>
             </a:r>
           </a:p>
         </p:txBody>
@@ -3118,8 +3118,8 @@
                 </a:solidFill>
                 <a:latin typeface="Arial"/>
               </a:rPr>
-              <a:t>MM/PBSA, same-size pairs
-95% CI [53.0, 69.3]</a:t>
+              <a:t>MM/PBSA, size-matched
+95% CI [55.5, 68.9]</a:t>
             </a:r>
           </a:p>
         </p:txBody>
@@ -3153,7 +3153,7 @@
                 </a:solidFill>
                 <a:latin typeface="Arial"/>
               </a:rPr>
-              <a:t>84.1%</a:t>
+              <a:t>83.9%</a:t>
             </a:r>
           </a:p>
         </p:txBody>
@@ -3221,7 +3221,7 @@
                 </a:solidFill>
                 <a:latin typeface="Arial"/>
               </a:rPr>
-              <a:t>2 of 5</a:t>
+              <a:t>1 of 5</a:t>
             </a:r>
           </a:p>
         </p:txBody>
@@ -3255,8 +3255,8 @@
                 </a:solidFill>
                 <a:latin typeface="Arial"/>
               </a:rPr>
-              <a:t>proteins with clear
-size-free skill</a:t>
+              <a:t>proteins individually
+above chance</a:t>
             </a:r>
           </a:p>
         </p:txBody>
